--- a/curriculum/M01/W05/L03/slides.pptx
+++ b/curriculum/M01/W05/L03/slides.pptx
@@ -4698,7 +4698,65 @@
                 <a:ea typeface="Malgun Gothic"/>
                 <a:cs typeface="Malgun Gothic"/>
               </a:rPr>
-              <a:t>1. *E. coli*를 무거운 질소 동위원소 ¹⁵N이 든 배지에서 여러 세대 키워 DNA 전체를 ¹⁵N으로 표지한다. 2. 이 세균을 보통 ¹⁴N 배지로 옮기고 한 세대, 두 세대 뒤의 DNA를 각각 뽑는다. 3. CsCl 밀도구배 평형 원심분리로 DNA를 밀도에 따라 분리한다.</a:t>
+              <a:t>1. *E. coli*를 무거운 질소 동위원소 ¹⁵N이 든 배지에서 여러 세대 키워 DNA 전체를 ¹⁵N으로 표지한다.</a:t>
+            </a:r>
+          </a:p>
+          <a:p>
+            <a:pPr>
+              <a:spcAft>
+                <a:spcPts val="900"/>
+              </a:spcAft>
+            </a:pPr>
+            <a:r>
+              <a:rPr sz="1600" b="1" i="0">
+                <a:solidFill>
+                  <a:srgbClr val="F2B705"/>
+                </a:solidFill>
+                <a:latin typeface="Malgun Gothic"/>
+                <a:ea typeface="Malgun Gothic"/>
+                <a:cs typeface="Malgun Gothic"/>
+              </a:rPr>
+              <a:t>•  </a:t>
+            </a:r>
+            <a:r>
+              <a:rPr sz="1600" b="0" i="0">
+                <a:solidFill>
+                  <a:srgbClr val="11202B"/>
+                </a:solidFill>
+                <a:latin typeface="Malgun Gothic"/>
+                <a:ea typeface="Malgun Gothic"/>
+                <a:cs typeface="Malgun Gothic"/>
+              </a:rPr>
+              <a:t>2. 이 세균을 보통 ¹⁴N 배지로 옮기고 한 세대, 두 세대 뒤의 DNA를 각각 뽑는다.</a:t>
+            </a:r>
+          </a:p>
+          <a:p>
+            <a:pPr>
+              <a:spcAft>
+                <a:spcPts val="900"/>
+              </a:spcAft>
+            </a:pPr>
+            <a:r>
+              <a:rPr sz="1600" b="1" i="0">
+                <a:solidFill>
+                  <a:srgbClr val="F2B705"/>
+                </a:solidFill>
+                <a:latin typeface="Malgun Gothic"/>
+                <a:ea typeface="Malgun Gothic"/>
+                <a:cs typeface="Malgun Gothic"/>
+              </a:rPr>
+              <a:t>•  </a:t>
+            </a:r>
+            <a:r>
+              <a:rPr sz="1600" b="0" i="0">
+                <a:solidFill>
+                  <a:srgbClr val="11202B"/>
+                </a:solidFill>
+                <a:latin typeface="Malgun Gothic"/>
+                <a:ea typeface="Malgun Gothic"/>
+                <a:cs typeface="Malgun Gothic"/>
+              </a:rPr>
+              <a:t>3. CsCl 밀도구배 평형 원심분리로 DNA를 밀도에 따라 분리한다.</a:t>
             </a:r>
           </a:p>
           <a:p>
@@ -9621,11 +9679,40 @@
                 <a:ea typeface="Malgun Gothic"/>
                 <a:cs typeface="Malgun Gothic"/>
               </a:rPr>
-              <a:t> 올바른 염기쌍만 활성 부위의 기하 구조에 맞으므로 잘못된 nucleotide의 결합이 드물다. 이 단계의 오류율은 약 10⁻⁵이다. 2. </a:t>
-            </a:r>
+              <a:t> 올바른 염기쌍만 활성 부위의 기하 구조에 맞으므로 잘못된 nucleotide의 결합이 드물다. 이 단계의 오류율은 약 10⁻⁵이다.</a:t>
+            </a:r>
+          </a:p>
+          <a:p>
+            <a:pPr>
+              <a:spcAft>
+                <a:spcPts val="900"/>
+              </a:spcAft>
+            </a:pPr>
             <a:r>
               <a:rPr sz="1600" b="1" i="0">
                 <a:solidFill>
+                  <a:srgbClr val="F2B705"/>
+                </a:solidFill>
+                <a:latin typeface="Malgun Gothic"/>
+                <a:ea typeface="Malgun Gothic"/>
+                <a:cs typeface="Malgun Gothic"/>
+              </a:rPr>
+              <a:t>•  </a:t>
+            </a:r>
+            <a:r>
+              <a:rPr sz="1600" b="0" i="0">
+                <a:solidFill>
+                  <a:srgbClr val="11202B"/>
+                </a:solidFill>
+                <a:latin typeface="Malgun Gothic"/>
+                <a:ea typeface="Malgun Gothic"/>
+                <a:cs typeface="Malgun Gothic"/>
+              </a:rPr>
+              <a:t>2. </a:t>
+            </a:r>
+            <a:r>
+              <a:rPr sz="1600" b="1" i="0">
+                <a:solidFill>
                   <a:srgbClr val="11202B"/>
                 </a:solidFill>
                 <a:latin typeface="Malgun Gothic"/>
@@ -9643,7 +9730,36 @@
                 <a:ea typeface="Malgun Gothic"/>
                 <a:cs typeface="Malgun Gothic"/>
               </a:rPr>
-              <a:t> DNA polymerase는 합성 활성 외에 방금 붙인 nucleotide를 떼어내는 활성을 함께 갖는다. 짝이 맞지 않으면 사슬 말단이 불안정해져 exonuclease 부위로 옮겨가 제거된다. 여기서 오류율이 약 10⁻⁷로 내려간다. 3. </a:t>
+              <a:t> DNA polymerase는 합성 활성 외에 방금 붙인 nucleotide를 떼어내는 활성을 함께 갖는다. 짝이 맞지 않으면 사슬 말단이 불안정해져 exonuclease 부위로 옮겨가 제거된다. 여기서 오류율이 약 10⁻⁷로 내려간다.</a:t>
+            </a:r>
+          </a:p>
+          <a:p>
+            <a:pPr>
+              <a:spcAft>
+                <a:spcPts val="900"/>
+              </a:spcAft>
+            </a:pPr>
+            <a:r>
+              <a:rPr sz="1600" b="1" i="0">
+                <a:solidFill>
+                  <a:srgbClr val="F2B705"/>
+                </a:solidFill>
+                <a:latin typeface="Malgun Gothic"/>
+                <a:ea typeface="Malgun Gothic"/>
+                <a:cs typeface="Malgun Gothic"/>
+              </a:rPr>
+              <a:t>•  </a:t>
+            </a:r>
+            <a:r>
+              <a:rPr sz="1600" b="0" i="0">
+                <a:solidFill>
+                  <a:srgbClr val="11202B"/>
+                </a:solidFill>
+                <a:latin typeface="Malgun Gothic"/>
+                <a:ea typeface="Malgun Gothic"/>
+                <a:cs typeface="Malgun Gothic"/>
+              </a:rPr>
+              <a:t>3. </a:t>
             </a:r>
             <a:r>
               <a:rPr sz="1600" b="1" i="0">

--- a/curriculum/M01/W05/L03/slides.pptx
+++ b/curriculum/M01/W05/L03/slides.pptx
@@ -14841,7 +14841,7 @@
                 <a:ea typeface="Malgun Gothic"/>
                 <a:cs typeface="Malgun Gothic"/>
               </a:rPr>
-              <a:t>M01-W05-L03 생체에너지: 자유에너지와 ATP — 효소의 촉매 작용, ATP와 GTP의 가수분해</a:t>
+              <a:t>M01-W09-L02 생체에너지: 자유에너지와 ATP — 효소의 촉매 작용, ATP와 GTP의 가수분해</a:t>
             </a:r>
           </a:p>
         </p:txBody>
